--- a/Topic_D/Exam_Practice/TD-L04_Writing_Workshop_Studying_Exams_and_Learning_Strategies.pptx
+++ b/Topic_D/Exam_Practice/TD-L04_Writing_Workshop_Studying_Exams_and_Learning_Strategies.pptx
@@ -784,7 +784,11 @@
           <a:lstStyle/>
           <a:p>
             <a:r>
-              <a:rPr lang="en-US" dirty="0"/>
+              <a:rPr lang="ar-SA" dirty="0">
+                <a:latin typeface="Amiri" pitchFamily="2" charset="-78"/>
+                <a:ea typeface="Amiri" pitchFamily="2" charset="-78"/>
+                <a:cs typeface="Amiri" pitchFamily="2" charset="-78"/>
+              </a:rPr>
               <a:t>Q3 (3 min to choose and read). Title (أ) suits Core and Develop; title (ب) suits Stretch.</a:t>
             </a:r>
             <a:endParaRPr lang="en-US" dirty="0"/>
@@ -1403,7 +1407,11 @@
           <a:lstStyle/>
           <a:p>
             <a:r>
-              <a:rPr lang="en-US" dirty="0"/>
+              <a:rPr lang="ar-SA" dirty="0">
+                <a:latin typeface="Amiri" pitchFamily="2" charset="-78"/>
+                <a:ea typeface="Amiri" pitchFamily="2" charset="-78"/>
+                <a:cs typeface="Amiri" pitchFamily="2" charset="-78"/>
+              </a:rPr>
               <a:t>WELCOME (1 min) — while students join.
 • Greet each student by name as they arrive: السَّلَامُ عَلَيْكُمْ. Take the register (Pastoral Tracker: attendance 0/1).
 • 2-MINUTE CHECK-IN (SEND training): a private chat to any student who seemed unsettled last lesson — “Are you okay today? 👍 / 👎”.
@@ -1936,7 +1944,11 @@
           <a:lstStyle/>
           <a:p>
             <a:r>
-              <a:rPr lang="en-US" dirty="0"/>
+              <a:rPr lang="ar-SA" dirty="0">
+                <a:latin typeface="Amiri" pitchFamily="2" charset="-78"/>
+                <a:ea typeface="Amiri" pitchFamily="2" charset="-78"/>
+                <a:cs typeface="Amiri" pitchFamily="2" charset="-78"/>
+              </a:rPr>
               <a:t>Question words: كَيْفَ (how) · مَتَى (when) · مَاذَا حَدَثَ (what happened — PAST) · نَصِيحَتُكَ (your advice) · سَتَفْعَلُ (will do — FUTURE).</a:t>
             </a:r>
             <a:endParaRPr lang="en-US" dirty="0"/>
@@ -2508,6 +2520,7 @@
                   <a:srgbClr val="D4AF37"/>
                 </a:solidFill>
                 <a:latin typeface="Amiri" pitchFamily="2" charset="-78"/>
+                <a:ea typeface="Amiri" pitchFamily="2" charset="-78"/>
                 <a:cs typeface="Amiri" pitchFamily="2" charset="-78"/>
               </a:rPr>
               <a:t>م</a:t>
@@ -2714,6 +2727,7 @@
                   <a:srgbClr val="D4AF37"/>
                 </a:solidFill>
                 <a:latin typeface="Amiri" pitchFamily="2" charset="-78"/>
+                <a:ea typeface="Amiri" pitchFamily="2" charset="-78"/>
                 <a:cs typeface="Amiri" pitchFamily="2" charset="-78"/>
               </a:rPr>
               <a:t>وَرْشَةُ الكِتَابَةِ — الدِّرَاسَةُ وَالامْتِحَانَاتُ</a:t>
@@ -3171,6 +3185,7 @@
                   <a:srgbClr val="D4AF37"/>
                 </a:solidFill>
                 <a:latin typeface="Amiri" pitchFamily="2" charset="-78"/>
+                <a:ea typeface="Amiri" pitchFamily="2" charset="-78"/>
                 <a:cs typeface="Amiri" pitchFamily="2" charset="-78"/>
               </a:rPr>
               <a:t>م</a:t>
@@ -3491,6 +3506,7 @@
                   <a:srgbClr val="8A6D1E"/>
                 </a:solidFill>
                 <a:latin typeface="Amiri" pitchFamily="2" charset="-78"/>
+                <a:ea typeface="Amiri" pitchFamily="2" charset="-78"/>
                 <a:cs typeface="Amiri" pitchFamily="2" charset="-78"/>
               </a:rPr>
               <a:t>نَمُوذَجُ الإِجَابَةِ</a:t>
@@ -3604,6 +3620,7 @@
                   <a:srgbClr val="1F2A37"/>
                 </a:solidFill>
                 <a:latin typeface="Amiri" pitchFamily="2" charset="-78"/>
+                <a:ea typeface="Amiri" pitchFamily="2" charset="-78"/>
                 <a:cs typeface="Amiri" pitchFamily="2" charset="-78"/>
               </a:rPr>
               <a:t>مَرْحَبًا يَا سَامِي،</a:t>
@@ -3623,6 +3640,7 @@
                   <a:srgbClr val="1F2A37"/>
                 </a:solidFill>
                 <a:latin typeface="Amiri" pitchFamily="2" charset="-78"/>
+                <a:ea typeface="Amiri" pitchFamily="2" charset="-78"/>
                 <a:cs typeface="Amiri" pitchFamily="2" charset="-78"/>
               </a:rPr>
               <a:t>كَيْفَ حَالُكَ؟ عِنْدِي امْتِحَانَاتٌ مُهِمَّةٌ بَعْدَ أُسْبُوعَيْنِ، لِذٰلِكَ أُرَاجِعُ كُلَّ يَوْمٍ. أُرَاجِعُ فِي المَكْتَبَةِ مِنَ السَّاعَةِ الرَّابِعَةِ إِلَى السَّادِسَةِ، وَأَكْتُبُ مُلَخَّصَاتٍ وَخَرَائِطَ ذِهْنِيَّةً. فِي الأُسْبُوعِ المَاضِي كَانَ عِنْدِي اخْتِبَارٌ فِي الكِيمْيَاءِ، وَكَانَ صَعْبًا، لِأَنِّي لَمْ أُرَاجِعْ جَيِّدًا. فِي رَأْيِي، إِنَّ تَنْظِيمَ الوَقْتِ مُهِمٌّ جِدًّا. نَصِيحَتِي لَكَ: يَنْبَغِي أَنْ تَبْدَأَ مُبَكِّرًا، وَلَا تَسْهَرْ قَبْلَ الامْتِحَانِ. بَعْدَ الامْتِحَانَاتِ سَأُسَافِرُ مَعَ أُسْرَتِي إِلَى البَحْرِ.</a:t>
@@ -3642,6 +3660,7 @@
                   <a:srgbClr val="1F2A37"/>
                 </a:solidFill>
                 <a:latin typeface="Amiri" pitchFamily="2" charset="-78"/>
+                <a:ea typeface="Amiri" pitchFamily="2" charset="-78"/>
                 <a:cs typeface="Amiri" pitchFamily="2" charset="-78"/>
               </a:rPr>
               <a:t>إِلَى اللِّقَاءِ،</a:t>
@@ -3661,6 +3680,7 @@
                   <a:srgbClr val="1F2A37"/>
                 </a:solidFill>
                 <a:latin typeface="Amiri" pitchFamily="2" charset="-78"/>
+                <a:ea typeface="Amiri" pitchFamily="2" charset="-78"/>
                 <a:cs typeface="Amiri" pitchFamily="2" charset="-78"/>
               </a:rPr>
               <a:t>يَاسِرُ</a:t>
@@ -3824,11 +3844,12 @@
               <a:buNone/>
             </a:pPr>
             <a:r>
-              <a:rPr lang="en-US" sz="950" b="1" dirty="0">
+              <a:rPr lang="ar-SA" sz="950" b="1" dirty="0">
                 <a:solidFill>
                   <a:srgbClr val="FFFFFF"/>
                 </a:solidFill>
                 <a:latin typeface="Calibri" pitchFamily="34" charset="0"/>
+                <a:ea typeface="Amiri" pitchFamily="2" charset="-78"/>
                 <a:cs typeface="Amiri" pitchFamily="2" charset="-78"/>
               </a:rPr>
               <a:t>أُرَاجِعُ فِي المَكْتَبَةِ</a:t>
@@ -3889,11 +3910,12 @@
               <a:buNone/>
             </a:pPr>
             <a:r>
-              <a:rPr lang="en-US" sz="950" b="1" dirty="0">
+              <a:rPr lang="ar-SA" sz="950" b="1" dirty="0">
                 <a:solidFill>
                   <a:srgbClr val="FFFFFF"/>
                 </a:solidFill>
                 <a:latin typeface="Calibri" pitchFamily="34" charset="0"/>
+                <a:ea typeface="Amiri" pitchFamily="2" charset="-78"/>
                 <a:cs typeface="Amiri" pitchFamily="2" charset="-78"/>
               </a:rPr>
               <a:t>وَكَانَ صَعْبًا</a:t>
@@ -3954,11 +3976,12 @@
               <a:buNone/>
             </a:pPr>
             <a:r>
-              <a:rPr lang="en-US" sz="950" b="1" dirty="0">
+              <a:rPr lang="ar-SA" sz="950" b="1" dirty="0">
                 <a:solidFill>
                   <a:srgbClr val="FFFFFF"/>
                 </a:solidFill>
                 <a:latin typeface="Calibri" pitchFamily="34" charset="0"/>
+                <a:ea typeface="Amiri" pitchFamily="2" charset="-78"/>
                 <a:cs typeface="Amiri" pitchFamily="2" charset="-78"/>
               </a:rPr>
               <a:t>إِنَّ تَنْظِيمَ الوَقْتِ</a:t>
@@ -4019,11 +4042,12 @@
               <a:buNone/>
             </a:pPr>
             <a:r>
-              <a:rPr lang="en-US" sz="950" b="1" dirty="0">
+              <a:rPr lang="ar-SA" sz="950" b="1" dirty="0">
                 <a:solidFill>
                   <a:srgbClr val="FFFFFF"/>
                 </a:solidFill>
                 <a:latin typeface="Calibri" pitchFamily="34" charset="0"/>
+                <a:ea typeface="Amiri" pitchFamily="2" charset="-78"/>
                 <a:cs typeface="Amiri" pitchFamily="2" charset="-78"/>
               </a:rPr>
               <a:t>وَلَا تَسْهَرْ</a:t>
@@ -4157,6 +4181,7 @@
                   <a:srgbClr val="D4AF37"/>
                 </a:solidFill>
                 <a:latin typeface="Amiri" pitchFamily="2" charset="-78"/>
+                <a:ea typeface="Amiri" pitchFamily="2" charset="-78"/>
                 <a:cs typeface="Amiri" pitchFamily="2" charset="-78"/>
               </a:rPr>
               <a:t>م</a:t>
@@ -4477,6 +4502,7 @@
                   <a:srgbClr val="8A6D1E"/>
                 </a:solidFill>
                 <a:latin typeface="Amiri" pitchFamily="2" charset="-78"/>
+                <a:ea typeface="Amiri" pitchFamily="2" charset="-78"/>
                 <a:cs typeface="Amiri" pitchFamily="2" charset="-78"/>
               </a:rPr>
               <a:t>نَمُوذَجُ الإِجَابَةِ</a:t>
@@ -4590,6 +4616,7 @@
                   <a:srgbClr val="1F2A37"/>
                 </a:solidFill>
                 <a:latin typeface="Amiri" pitchFamily="2" charset="-78"/>
+                <a:ea typeface="Amiri" pitchFamily="2" charset="-78"/>
                 <a:cs typeface="Amiri" pitchFamily="2" charset="-78"/>
               </a:rPr>
               <a:t>عَزِيزِي سَامِي،</a:t>
@@ -4609,6 +4636,7 @@
                   <a:srgbClr val="1F2A37"/>
                 </a:solidFill>
                 <a:latin typeface="Amiri" pitchFamily="2" charset="-78"/>
+                <a:ea typeface="Amiri" pitchFamily="2" charset="-78"/>
                 <a:cs typeface="Amiri" pitchFamily="2" charset="-78"/>
               </a:rPr>
               <a:t>تَبْدَأُ امْتِحَانَاتِي النِّهَائِيَّةُ بَعْدَ أُسْبُوعَيْنِ، وَقَدْ وَضَعْتُ لِنَفْسِي جَدْوَلًا صَارِمًا: أُرَاجِعُ فِي المَكْتَبَةِ كُلَّ يَوْمٍ مِنَ الرَّابِعَةِ إِلَى السَّابِعَةِ، وَأُحَوِّلُ كُلَّ دَرْسٍ إِلَى خَرِيطَةٍ ذِهْنِيَّةٍ مُلَوَّنَةٍ. وَقَدْ تَعَلَّمْتُ هٰذَا الدَّرْسَ بِالطَّرِيقَةِ الصَّعْبَةِ؛ فَفِي الامْتِحَانِ التَّجْرِيبِيِّ لِلْكِيمْيَاءِ كَانَتِ الأَسْئِلَةُ أَصْعَبَ مِمَّا تَوَقَّعْتُ، لِأَنِّي أَجَّلْتُ المُرَاجَعَةَ إِلَى اللَّيْلَةِ الأَخِيرَةِ. إِنَّ التَّنْظِيمَ فِي رَأْيِي أَهَمُّ مِنْ عَدَدِ السَّاعَاتِ؛ لِذٰلِكَ أَنْصَحُكَ بِأَنْ تَبْدَأَ مُبَكِّرًا، وَأَلَّا تُضَحِّيَ بِالنَّوْمِ أَبَدًا. وَإِذَا نَجَحْتُ كَمَا أَتَمَنَّى، فَسَأَحْتَفِلُ بِرِحْلَةٍ إِلَى البَحْرِ مَعَ أُسْرَتِي.</a:t>
@@ -4628,6 +4656,7 @@
                   <a:srgbClr val="1F2A37"/>
                 </a:solidFill>
                 <a:latin typeface="Amiri" pitchFamily="2" charset="-78"/>
+                <a:ea typeface="Amiri" pitchFamily="2" charset="-78"/>
                 <a:cs typeface="Amiri" pitchFamily="2" charset="-78"/>
               </a:rPr>
               <a:t>مَعَ تَمَنِّيَاتِي بِالتَّوْفِيقِ،</a:t>
@@ -4647,6 +4676,7 @@
                   <a:srgbClr val="1F2A37"/>
                 </a:solidFill>
                 <a:latin typeface="Amiri" pitchFamily="2" charset="-78"/>
+                <a:ea typeface="Amiri" pitchFamily="2" charset="-78"/>
                 <a:cs typeface="Amiri" pitchFamily="2" charset="-78"/>
               </a:rPr>
               <a:t>يَاسِرُ</a:t>
@@ -4810,11 +4840,12 @@
               <a:buNone/>
             </a:pPr>
             <a:r>
-              <a:rPr lang="en-US" sz="950" b="1" dirty="0">
+              <a:rPr lang="ar-SA" sz="950" b="1" dirty="0">
                 <a:solidFill>
                   <a:srgbClr val="FFFFFF"/>
                 </a:solidFill>
                 <a:latin typeface="Calibri" pitchFamily="34" charset="0"/>
+                <a:ea typeface="Amiri" pitchFamily="2" charset="-78"/>
                 <a:cs typeface="Amiri" pitchFamily="2" charset="-78"/>
               </a:rPr>
               <a:t>وَضَعْتُ لِنَفْسِي</a:t>
@@ -4875,11 +4906,12 @@
               <a:buNone/>
             </a:pPr>
             <a:r>
-              <a:rPr lang="en-US" sz="950" b="1" dirty="0">
+              <a:rPr lang="ar-SA" sz="950" b="1" dirty="0">
                 <a:solidFill>
                   <a:srgbClr val="FFFFFF"/>
                 </a:solidFill>
                 <a:latin typeface="Calibri" pitchFamily="34" charset="0"/>
+                <a:ea typeface="Amiri" pitchFamily="2" charset="-78"/>
                 <a:cs typeface="Amiri" pitchFamily="2" charset="-78"/>
               </a:rPr>
               <a:t>أَصْعَبَ مِمَّا تَوَقَّعْتُ</a:t>
@@ -4940,11 +4972,12 @@
               <a:buNone/>
             </a:pPr>
             <a:r>
-              <a:rPr lang="en-US" sz="950" b="1" dirty="0">
+              <a:rPr lang="ar-SA" sz="950" b="1" dirty="0">
                 <a:solidFill>
                   <a:srgbClr val="FFFFFF"/>
                 </a:solidFill>
                 <a:latin typeface="Calibri" pitchFamily="34" charset="0"/>
+                <a:ea typeface="Amiri" pitchFamily="2" charset="-78"/>
                 <a:cs typeface="Amiri" pitchFamily="2" charset="-78"/>
               </a:rPr>
               <a:t>إِنَّ التَّنْظِيمَ</a:t>
@@ -5005,11 +5038,12 @@
               <a:buNone/>
             </a:pPr>
             <a:r>
-              <a:rPr lang="en-US" sz="950" b="1" dirty="0">
+              <a:rPr lang="ar-SA" sz="950" b="1" dirty="0">
                 <a:solidFill>
                   <a:srgbClr val="FFFFFF"/>
                 </a:solidFill>
                 <a:latin typeface="Calibri" pitchFamily="34" charset="0"/>
+                <a:ea typeface="Amiri" pitchFamily="2" charset="-78"/>
                 <a:cs typeface="Amiri" pitchFamily="2" charset="-78"/>
               </a:rPr>
               <a:t>وَأَلَّا تُضَحِّيَ</a:t>
@@ -5143,6 +5177,7 @@
                   <a:srgbClr val="D4AF37"/>
                 </a:solidFill>
                 <a:latin typeface="Amiri" pitchFamily="2" charset="-78"/>
+                <a:ea typeface="Amiri" pitchFamily="2" charset="-78"/>
                 <a:cs typeface="Amiri" pitchFamily="2" charset="-78"/>
               </a:rPr>
               <a:t>م</a:t>
@@ -5463,6 +5498,7 @@
                   <a:srgbClr val="8A6D1E"/>
                 </a:solidFill>
                 <a:latin typeface="Amiri" pitchFamily="2" charset="-78"/>
+                <a:ea typeface="Amiri" pitchFamily="2" charset="-78"/>
                 <a:cs typeface="Amiri" pitchFamily="2" charset="-78"/>
               </a:rPr>
               <a:t>اخْتَرْ عُنْوَانًا وَاحِدًا</a:t>
@@ -5743,6 +5779,7 @@
                   <a:srgbClr val="1B3B6F"/>
                 </a:solidFill>
                 <a:latin typeface="Amiri" pitchFamily="2" charset="-78"/>
+                <a:ea typeface="Amiri" pitchFamily="2" charset="-78"/>
                 <a:cs typeface="Amiri" pitchFamily="2" charset="-78"/>
               </a:rPr>
               <a:t>كَيْفَ تَعَلَّمْتُ أَنْ أُرَاجِعَ</a:t>
@@ -5781,6 +5818,7 @@
                   <a:srgbClr val="1B3B6F"/>
                 </a:solidFill>
                 <a:latin typeface="Amiri" pitchFamily="2" charset="-78"/>
+                <a:ea typeface="Amiri" pitchFamily="2" charset="-78"/>
                 <a:cs typeface="Amiri" pitchFamily="2" charset="-78"/>
               </a:rPr>
               <a:t>(أ)</a:t>
@@ -5884,6 +5922,7 @@
                   <a:srgbClr val="1B3B6F"/>
                 </a:solidFill>
                 <a:latin typeface="Amiri" pitchFamily="2" charset="-78"/>
+                <a:ea typeface="Amiri" pitchFamily="2" charset="-78"/>
                 <a:cs typeface="Amiri" pitchFamily="2" charset="-78"/>
               </a:rPr>
               <a:t>طَرِيقَتُكَ فِي المُرَاجَعَةِ · تَنْظِيمُ الوَقْتِ · امْتِحَانٌ لَا تَنْسَاهُ · نَصَائِحُكَ وَخِطَطُكَ</a:t>
@@ -6015,6 +6054,7 @@
                   <a:srgbClr val="1B3B6F"/>
                 </a:solidFill>
                 <a:latin typeface="Amiri" pitchFamily="2" charset="-78"/>
+                <a:ea typeface="Amiri" pitchFamily="2" charset="-78"/>
                 <a:cs typeface="Amiri" pitchFamily="2" charset="-78"/>
               </a:rPr>
               <a:t>ضَغْطُ الامْتِحَانَاتِ: ثَمَنٌ لِلنَّجَاحِ؟</a:t>
@@ -6053,6 +6093,7 @@
                   <a:srgbClr val="1B3B6F"/>
                 </a:solidFill>
                 <a:latin typeface="Amiri" pitchFamily="2" charset="-78"/>
+                <a:ea typeface="Amiri" pitchFamily="2" charset="-78"/>
                 <a:cs typeface="Amiri" pitchFamily="2" charset="-78"/>
               </a:rPr>
               <a:t>(ب)</a:t>
@@ -6156,6 +6197,7 @@
                   <a:srgbClr val="1B3B6F"/>
                 </a:solidFill>
                 <a:latin typeface="Amiri" pitchFamily="2" charset="-78"/>
+                <a:ea typeface="Amiri" pitchFamily="2" charset="-78"/>
                 <a:cs typeface="Amiri" pitchFamily="2" charset="-78"/>
               </a:rPr>
               <a:t>المُشْكِلَةُ · فَوَائِدُ القَلَقِ وَأَضْرَارُهُ · مِثَالٌ مِنَ الوَاقِعِ · رَأْيُكَ وَالحَلُّ</a:t>
@@ -6355,6 +6397,7 @@
                   <a:srgbClr val="D4AF37"/>
                 </a:solidFill>
                 <a:latin typeface="Amiri" pitchFamily="2" charset="-78"/>
+                <a:ea typeface="Amiri" pitchFamily="2" charset="-78"/>
                 <a:cs typeface="Amiri" pitchFamily="2" charset="-78"/>
               </a:rPr>
               <a:t>م</a:t>
@@ -6675,6 +6718,7 @@
                   <a:srgbClr val="8A6D1E"/>
                 </a:solidFill>
                 <a:latin typeface="Amiri" pitchFamily="2" charset="-78"/>
+                <a:ea typeface="Amiri" pitchFamily="2" charset="-78"/>
                 <a:cs typeface="Amiri" pitchFamily="2" charset="-78"/>
               </a:rPr>
               <a:t>خُطَّةُ الكِتَابَةِ</a:t>
@@ -7299,6 +7343,7 @@
                   <a:srgbClr val="1B3B6F"/>
                 </a:solidFill>
                 <a:latin typeface="Amiri" pitchFamily="2" charset="-78"/>
+                <a:ea typeface="Amiri" pitchFamily="2" charset="-78"/>
                 <a:cs typeface="Amiri" pitchFamily="2" charset="-78"/>
               </a:rPr>
               <a:t>أُغْلِقُ هَاتِفِي لِكَيْ أُرَكِّزَ أَكْثَرَ.</a:t>
@@ -7398,6 +7443,7 @@
                   <a:srgbClr val="1B3B6F"/>
                 </a:solidFill>
                 <a:latin typeface="Amiri" pitchFamily="2" charset="-78"/>
+                <a:ea typeface="Amiri" pitchFamily="2" charset="-78"/>
                 <a:cs typeface="Amiri" pitchFamily="2" charset="-78"/>
               </a:rPr>
               <a:t>كَانَ الامْتِحَانُ صَعْبًا، وَكَانَتْ دَرَجَتِي ضَعِيفَةً.</a:t>
@@ -7497,6 +7543,7 @@
                   <a:srgbClr val="1B3B6F"/>
                 </a:solidFill>
                 <a:latin typeface="Amiri" pitchFamily="2" charset="-78"/>
+                <a:ea typeface="Amiri" pitchFamily="2" charset="-78"/>
                 <a:cs typeface="Amiri" pitchFamily="2" charset="-78"/>
               </a:rPr>
               <a:t>سَأُرَاجِعُ بِطَرِيقَةٍ أَفْضَلَ.</a:t>
@@ -7658,6 +7705,7 @@
                   <a:srgbClr val="1F2A37"/>
                 </a:solidFill>
                 <a:latin typeface="Amiri" pitchFamily="2" charset="-78"/>
+                <a:ea typeface="Amiri" pitchFamily="2" charset="-78"/>
                 <a:cs typeface="Amiri" pitchFamily="2" charset="-78"/>
               </a:rPr>
               <a:t>أ</a:t>
@@ -7684,6 +7732,7 @@
                   <a:srgbClr val="1F2A37"/>
                 </a:solidFill>
                 <a:latin typeface="Amiri" pitchFamily="2" charset="-78"/>
+                <a:ea typeface="Amiri" pitchFamily="2" charset="-78"/>
                 <a:cs typeface="Amiri" pitchFamily="2" charset="-78"/>
               </a:rPr>
               <a:t>ب</a:t>
@@ -7830,6 +7879,7 @@
                   <a:srgbClr val="D4AF37"/>
                 </a:solidFill>
                 <a:latin typeface="Amiri" pitchFamily="2" charset="-78"/>
+                <a:ea typeface="Amiri" pitchFamily="2" charset="-78"/>
                 <a:cs typeface="Amiri" pitchFamily="2" charset="-78"/>
               </a:rPr>
               <a:t>م</a:t>
@@ -8087,6 +8137,7 @@
                   <a:srgbClr val="8A6D1E"/>
                 </a:solidFill>
                 <a:latin typeface="Amiri" pitchFamily="2" charset="-78"/>
+                <a:ea typeface="Amiri" pitchFamily="2" charset="-78"/>
                 <a:cs typeface="Amiri" pitchFamily="2" charset="-78"/>
               </a:rPr>
               <a:t>أ</a:t>
@@ -8151,6 +8202,7 @@
                   <a:srgbClr val="1B3B6F"/>
                 </a:solidFill>
                 <a:latin typeface="Amiri" pitchFamily="2" charset="-78"/>
+                <a:ea typeface="Amiri" pitchFamily="2" charset="-78"/>
                 <a:cs typeface="Amiri" pitchFamily="2" charset="-78"/>
               </a:rPr>
               <a:t>أ</a:t>
@@ -8202,6 +8254,7 @@
                   <a:srgbClr val="8A6D1E"/>
                 </a:solidFill>
                 <a:latin typeface="Amiri" pitchFamily="2" charset="-78"/>
+                <a:ea typeface="Amiri" pitchFamily="2" charset="-78"/>
                 <a:cs typeface="Amiri" pitchFamily="2" charset="-78"/>
               </a:rPr>
               <a:t>نَمُوذَجُ الإِجَابَةِ</a:t>
@@ -8315,6 +8368,7 @@
                   <a:srgbClr val="1F2A37"/>
                 </a:solidFill>
                 <a:latin typeface="Amiri" pitchFamily="2" charset="-78"/>
+                <a:ea typeface="Amiri" pitchFamily="2" charset="-78"/>
                 <a:cs typeface="Amiri" pitchFamily="2" charset="-78"/>
               </a:rPr>
               <a:t>أَنَا فِي الصَّفِّ الحَادِي عَشَرَ، وَعِنْدِي امْتِحَانَاتٌ مُهِمَّةٌ هٰذِهِ السَّنَةَ. لِذٰلِكَ أُرَاجِعُ كُلَّ يَوْمٍ بَعْدَ المَدْرَسَةِ. أُرَاجِعُ فِي غُرْفَتِي، وَأُغْلِقُ هَاتِفِي، لِكَيْ أُرَكِّزَ أَكْثَرَ. أَكْتُبُ مُلَخَّصَاتٍ قَصِيرَةً، وَأَحُلُّ امْتِحَانَاتٍ سَابِقَةً كَثِيرَةً.</a:t>
@@ -8334,6 +8388,7 @@
                   <a:srgbClr val="1F2A37"/>
                 </a:solidFill>
                 <a:latin typeface="Amiri" pitchFamily="2" charset="-78"/>
+                <a:ea typeface="Amiri" pitchFamily="2" charset="-78"/>
                 <a:cs typeface="Amiri" pitchFamily="2" charset="-78"/>
               </a:rPr>
               <a:t>إِنَّ تَنْظِيمَ الوَقْتِ مُهِمٌّ جِدًّا. عِنْدِي جَدْوَلٌ لِلْمُرَاجَعَةِ: أُرَاجِعُ مَادَّتَيْنِ كُلَّ يَوْمٍ، وَآخُذُ اسْتِرَاحَةً قَصِيرَةً كُلَّ نِصْفِ سَاعَةٍ. فِي يَوْمِ الجُمُعَةِ لَا أُرَاجِعُ، بَلْ أَلْعَبُ كُرَةَ القَدَمِ مَعَ أَصْدِقَائِي.</a:t>
@@ -8353,6 +8408,7 @@
                   <a:srgbClr val="1F2A37"/>
                 </a:solidFill>
                 <a:latin typeface="Amiri" pitchFamily="2" charset="-78"/>
+                <a:ea typeface="Amiri" pitchFamily="2" charset="-78"/>
                 <a:cs typeface="Amiri" pitchFamily="2" charset="-78"/>
               </a:rPr>
               <a:t>فِي السَّنَةِ المَاضِيَةِ كَانَ عِنْدِي امْتِحَانٌ فِي الفِيزْيَاءِ، وَكَانَ صَعْبًا جِدًّا. سَهِرْتُ حَتَّى السَّاعَةِ الثَّانِيَةِ لَيْلًا، فَكُنْتُ تَعْبَانَ فِي الامْتِحَانِ، وَنَسِيتُ أَشْيَاءَ كَثِيرَةً. كَانَتْ دَرَجَتِي ضَعِيفَةً، وَحَزِنْتُ كَثِيرًا.</a:t>
@@ -8372,6 +8428,7 @@
                   <a:srgbClr val="1F2A37"/>
                 </a:solidFill>
                 <a:latin typeface="Amiri" pitchFamily="2" charset="-78"/>
+                <a:ea typeface="Amiri" pitchFamily="2" charset="-78"/>
                 <a:cs typeface="Amiri" pitchFamily="2" charset="-78"/>
               </a:rPr>
               <a:t>فِي رَأْيِي، يَنْبَغِي أَنْ يَبْدَأَ الطُّلَّابُ المُرَاجَعَةَ مُبَكِّرًا، وَأَنْ يَنَامُوا جَيِّدًا. فِي المُسْتَقْبَلِ سَأُرَاجِعُ بِطَرِيقَةٍ أَفْضَلَ، وَسَأَحْصُلُ عَلَى دَرَجَاتٍ عَالِيَةٍ إِنْ شَاءَ اللّٰهُ.</a:t>
@@ -8535,11 +8592,12 @@
               <a:buNone/>
             </a:pPr>
             <a:r>
-              <a:rPr lang="en-US" sz="950" b="1" dirty="0">
+              <a:rPr lang="ar-SA" sz="950" b="1" dirty="0">
                 <a:solidFill>
                   <a:srgbClr val="FFFFFF"/>
                 </a:solidFill>
                 <a:latin typeface="Calibri" pitchFamily="34" charset="0"/>
+                <a:ea typeface="Amiri" pitchFamily="2" charset="-78"/>
                 <a:cs typeface="Amiri" pitchFamily="2" charset="-78"/>
               </a:rPr>
               <a:t>لِكَيْ أُرَكِّزَ</a:t>
@@ -8600,11 +8658,12 @@
               <a:buNone/>
             </a:pPr>
             <a:r>
-              <a:rPr lang="en-US" sz="950" b="1" dirty="0">
+              <a:rPr lang="ar-SA" sz="950" b="1" dirty="0">
                 <a:solidFill>
                   <a:srgbClr val="FFFFFF"/>
                 </a:solidFill>
                 <a:latin typeface="Calibri" pitchFamily="34" charset="0"/>
+                <a:ea typeface="Amiri" pitchFamily="2" charset="-78"/>
                 <a:cs typeface="Amiri" pitchFamily="2" charset="-78"/>
               </a:rPr>
               <a:t>إِنَّ تَنْظِيمَ الوَقْتِ</a:t>
@@ -8665,11 +8724,12 @@
               <a:buNone/>
             </a:pPr>
             <a:r>
-              <a:rPr lang="en-US" sz="950" b="1" dirty="0">
+              <a:rPr lang="ar-SA" sz="950" b="1" dirty="0">
                 <a:solidFill>
                   <a:srgbClr val="FFFFFF"/>
                 </a:solidFill>
                 <a:latin typeface="Calibri" pitchFamily="34" charset="0"/>
+                <a:ea typeface="Amiri" pitchFamily="2" charset="-78"/>
                 <a:cs typeface="Amiri" pitchFamily="2" charset="-78"/>
               </a:rPr>
               <a:t>وَكَانَ صَعْبًا جِدًّا</a:t>
@@ -8730,11 +8790,12 @@
               <a:buNone/>
             </a:pPr>
             <a:r>
-              <a:rPr lang="en-US" sz="950" b="1" dirty="0">
+              <a:rPr lang="ar-SA" sz="950" b="1" dirty="0">
                 <a:solidFill>
                   <a:srgbClr val="FFFFFF"/>
                 </a:solidFill>
                 <a:latin typeface="Calibri" pitchFamily="34" charset="0"/>
+                <a:ea typeface="Amiri" pitchFamily="2" charset="-78"/>
                 <a:cs typeface="Amiri" pitchFamily="2" charset="-78"/>
               </a:rPr>
               <a:t>يَنْبَغِي أَنْ يَبْدَأَ</a:t>
@@ -8868,6 +8929,7 @@
                   <a:srgbClr val="D4AF37"/>
                 </a:solidFill>
                 <a:latin typeface="Amiri" pitchFamily="2" charset="-78"/>
+                <a:ea typeface="Amiri" pitchFamily="2" charset="-78"/>
                 <a:cs typeface="Amiri" pitchFamily="2" charset="-78"/>
               </a:rPr>
               <a:t>م</a:t>
@@ -9125,6 +9187,7 @@
                   <a:srgbClr val="8A6D1E"/>
                 </a:solidFill>
                 <a:latin typeface="Amiri" pitchFamily="2" charset="-78"/>
+                <a:ea typeface="Amiri" pitchFamily="2" charset="-78"/>
                 <a:cs typeface="Amiri" pitchFamily="2" charset="-78"/>
               </a:rPr>
               <a:t>أ</a:t>
@@ -9189,6 +9252,7 @@
                   <a:srgbClr val="1B3B6F"/>
                 </a:solidFill>
                 <a:latin typeface="Amiri" pitchFamily="2" charset="-78"/>
+                <a:ea typeface="Amiri" pitchFamily="2" charset="-78"/>
                 <a:cs typeface="Amiri" pitchFamily="2" charset="-78"/>
               </a:rPr>
               <a:t>أ</a:t>
@@ -9240,6 +9304,7 @@
                   <a:srgbClr val="8A6D1E"/>
                 </a:solidFill>
                 <a:latin typeface="Amiri" pitchFamily="2" charset="-78"/>
+                <a:ea typeface="Amiri" pitchFamily="2" charset="-78"/>
                 <a:cs typeface="Amiri" pitchFamily="2" charset="-78"/>
               </a:rPr>
               <a:t>نَمُوذَجُ الإِجَابَةِ</a:t>
@@ -9353,6 +9418,7 @@
                   <a:srgbClr val="1F2A37"/>
                 </a:solidFill>
                 <a:latin typeface="Amiri" pitchFamily="2" charset="-78"/>
+                <a:ea typeface="Amiri" pitchFamily="2" charset="-78"/>
                 <a:cs typeface="Amiri" pitchFamily="2" charset="-78"/>
               </a:rPr>
               <a:t>كُنْتُ أَظُنُّ أَنَّ النَّجَاحَ فِي الامْتِحَانَاتِ يَعْتَمِدُ عَلَى عَدَدِ السَّاعَاتِ الَّتِي نَقْضِيهَا أَمَامَ الكُتُبِ، إِلَى أَنْ تَعَلَّمْتُ دَرْسًا قَاسِيًا فِي الصَّفِّ العَاشِرِ، دَرْسًا غَيَّرَ طَرِيقَتِي فِي الدِّرَاسَةِ إِلَى الأَبَدِ.</a:t>
@@ -9372,6 +9438,7 @@
                   <a:srgbClr val="1F2A37"/>
                 </a:solidFill>
                 <a:latin typeface="Amiri" pitchFamily="2" charset="-78"/>
+                <a:ea typeface="Amiri" pitchFamily="2" charset="-78"/>
                 <a:cs typeface="Amiri" pitchFamily="2" charset="-78"/>
               </a:rPr>
               <a:t>فَقَبْلَ امْتِحَانِ الفِيزْيَاءِ التَّجْرِيبِيِّ، سَهِرْتُ ثَلَاثَ لَيَالٍ مُتَتَالِيَةٍ أَقْرَأُ وَأُعِيدُ القِرَاءَةَ، فَدَخَلْتُ القَاعَةَ مُتْعَبًا إِلَى دَرَجَةِ أَنِّي نَسِيتُ قَوَانِينَ كُنْتُ أَحْفَظُهَا جَيِّدًا. وَكَانَتِ النَّتِيجَةُ أَسْوَأَ دَرَجَةٍ حَصَلْتُ عَلَيْهَا فِي حَيَاتِي، فَخَرَجْتُ مِنَ المَدْرَسَةِ يَوْمَهَا مَكْسُورَ القَلْبِ.</a:t>
@@ -9391,6 +9458,7 @@
                   <a:srgbClr val="1F2A37"/>
                 </a:solidFill>
                 <a:latin typeface="Amiri" pitchFamily="2" charset="-78"/>
+                <a:ea typeface="Amiri" pitchFamily="2" charset="-78"/>
                 <a:cs typeface="Amiri" pitchFamily="2" charset="-78"/>
               </a:rPr>
               <a:t>عِنْدَهَا غَيَّرْتُ طَرِيقَتِي تَمَامًا؛ فَأَصْبَحْتُ أُرَاجِعُ عَلَى فَتَرَاتٍ قَصِيرَةٍ، وَأَخْتَبِرُ نَفْسِي بَدَلًا مِنْ إِعَادَةِ القِرَاءَةِ، وَأَشْرَحُ الدُّرُوسَ لِأُخْتِي الصَّغِيرَةِ، لِأَنَّ الشَّرْحَ يَكْشِفُ بِوُضُوحٍ مَا لَمْ أَفْهَمْهُ جَيِّدًا بَعْدُ. وَالأَهَمُّ أَنِّي صِرْتُ أَنَامُ ثَمَانِيَ سَاعَاتٍ كَامِلَةً مَهْمَا كَانَ الضَّغْطُ كَبِيرًا.</a:t>
@@ -9410,6 +9478,7 @@
                   <a:srgbClr val="1F2A37"/>
                 </a:solidFill>
                 <a:latin typeface="Amiri" pitchFamily="2" charset="-78"/>
+                <a:ea typeface="Amiri" pitchFamily="2" charset="-78"/>
                 <a:cs typeface="Amiri" pitchFamily="2" charset="-78"/>
               </a:rPr>
               <a:t>صَحِيحٌ أَنَّ الجُهْدَ ضَرُورِيٌّ، غَيْرَ أَنَّ الذَّكَاءَ فِي اسْتِخْدَامِهِ هُوَ مَا يَصْنَعُ الفَرْقَ. وَلَوْ عَرَفْتُ هٰذَا مِنْ قَبْلُ، لَوَفَّرْتُ عَلَى نَفْسِي كَثِيرًا مِنَ القَلَقِ وَاللَّيَالِي الضَّائِعَةِ.</a:t>
@@ -9508,11 +9577,12 @@
               <a:buNone/>
             </a:pPr>
             <a:r>
-              <a:rPr lang="en-US" sz="950" b="1" dirty="0">
+              <a:rPr lang="ar-SA" sz="950" b="1" dirty="0">
                 <a:solidFill>
                   <a:srgbClr val="FFFFFF"/>
                 </a:solidFill>
                 <a:latin typeface="Calibri" pitchFamily="34" charset="0"/>
+                <a:ea typeface="Amiri" pitchFamily="2" charset="-78"/>
                 <a:cs typeface="Amiri" pitchFamily="2" charset="-78"/>
               </a:rPr>
               <a:t>كُنْتُ أَظُنُّ أَنَّ</a:t>
@@ -9573,11 +9643,12 @@
               <a:buNone/>
             </a:pPr>
             <a:r>
-              <a:rPr lang="en-US" sz="950" b="1" dirty="0">
+              <a:rPr lang="ar-SA" sz="950" b="1" dirty="0">
                 <a:solidFill>
                   <a:srgbClr val="FFFFFF"/>
                 </a:solidFill>
                 <a:latin typeface="Calibri" pitchFamily="34" charset="0"/>
+                <a:ea typeface="Amiri" pitchFamily="2" charset="-78"/>
                 <a:cs typeface="Amiri" pitchFamily="2" charset="-78"/>
               </a:rPr>
               <a:t>إِلَى دَرَجَةِ أَنِّي</a:t>
@@ -9638,11 +9709,12 @@
               <a:buNone/>
             </a:pPr>
             <a:r>
-              <a:rPr lang="en-US" sz="950" b="1" dirty="0">
+              <a:rPr lang="ar-SA" sz="950" b="1" dirty="0">
                 <a:solidFill>
                   <a:srgbClr val="FFFFFF"/>
                 </a:solidFill>
                 <a:latin typeface="Calibri" pitchFamily="34" charset="0"/>
+                <a:ea typeface="Amiri" pitchFamily="2" charset="-78"/>
                 <a:cs typeface="Amiri" pitchFamily="2" charset="-78"/>
               </a:rPr>
               <a:t>بَدَلًا مِنْ إِعَادَةِ</a:t>
@@ -9703,11 +9775,12 @@
               <a:buNone/>
             </a:pPr>
             <a:r>
-              <a:rPr lang="en-US" sz="950" b="1" dirty="0">
+              <a:rPr lang="ar-SA" sz="950" b="1" dirty="0">
                 <a:solidFill>
                   <a:srgbClr val="FFFFFF"/>
                 </a:solidFill>
                 <a:latin typeface="Calibri" pitchFamily="34" charset="0"/>
+                <a:ea typeface="Amiri" pitchFamily="2" charset="-78"/>
                 <a:cs typeface="Amiri" pitchFamily="2" charset="-78"/>
               </a:rPr>
               <a:t>لَوْ عَرَفْتُ … لَوَفَّرْتُ</a:t>
@@ -9841,6 +9914,7 @@
                   <a:srgbClr val="D4AF37"/>
                 </a:solidFill>
                 <a:latin typeface="Amiri" pitchFamily="2" charset="-78"/>
+                <a:ea typeface="Amiri" pitchFamily="2" charset="-78"/>
                 <a:cs typeface="Amiri" pitchFamily="2" charset="-78"/>
               </a:rPr>
               <a:t>م</a:t>
@@ -10098,6 +10172,7 @@
                   <a:srgbClr val="8A6D1E"/>
                 </a:solidFill>
                 <a:latin typeface="Amiri" pitchFamily="2" charset="-78"/>
+                <a:ea typeface="Amiri" pitchFamily="2" charset="-78"/>
                 <a:cs typeface="Amiri" pitchFamily="2" charset="-78"/>
               </a:rPr>
               <a:t>ب</a:t>
@@ -10162,6 +10237,7 @@
                   <a:srgbClr val="1B3B6F"/>
                 </a:solidFill>
                 <a:latin typeface="Amiri" pitchFamily="2" charset="-78"/>
+                <a:ea typeface="Amiri" pitchFamily="2" charset="-78"/>
                 <a:cs typeface="Amiri" pitchFamily="2" charset="-78"/>
               </a:rPr>
               <a:t>ب</a:t>
@@ -10213,6 +10289,7 @@
                   <a:srgbClr val="8A6D1E"/>
                 </a:solidFill>
                 <a:latin typeface="Amiri" pitchFamily="2" charset="-78"/>
+                <a:ea typeface="Amiri" pitchFamily="2" charset="-78"/>
                 <a:cs typeface="Amiri" pitchFamily="2" charset="-78"/>
               </a:rPr>
               <a:t>نَمُوذَجُ الإِجَابَةِ</a:t>
@@ -10326,6 +10403,7 @@
                   <a:srgbClr val="1F2A37"/>
                 </a:solidFill>
                 <a:latin typeface="Amiri" pitchFamily="2" charset="-78"/>
+                <a:ea typeface="Amiri" pitchFamily="2" charset="-78"/>
                 <a:cs typeface="Amiri" pitchFamily="2" charset="-78"/>
               </a:rPr>
               <a:t>يَعِيشُ كَثِيرٌ مِنَ الطُّلَّابِ فِي فَتْرَةِ الامْتِحَانَاتِ تَحْتَ ضَغْطٍ هَائِلٍ، حَتَّى إِنَّ بَعْضَهُمْ يَفْقِدُ القُدْرَةَ عَلَى النَّوْمِ أَوِ الأَكْلِ. فَهَلْ هٰذَا الضَّغْطُ ثَمَنٌ ضَرُورِيٌّ لِلنَّجَاحِ، أَمْ أَنَّنَا نَسْتَطِيعُ أَنْ نَتَجَنَّبَهُ؟</a:t>
@@ -10345,6 +10423,7 @@
                   <a:srgbClr val="1F2A37"/>
                 </a:solidFill>
                 <a:latin typeface="Amiri" pitchFamily="2" charset="-78"/>
+                <a:ea typeface="Amiri" pitchFamily="2" charset="-78"/>
                 <a:cs typeface="Amiri" pitchFamily="2" charset="-78"/>
               </a:rPr>
               <a:t>مِنْ نَاحِيَةٍ، إِنَّ قَلِيلًا مِنَ القَلَقِ مُفِيدٌ، لِأَنَّهُ يَدْفَعُنَا إِلَى المُرَاجَعَةِ وَالاسْتِعْدَادِ. وَمِنْ نَاحِيَةٍ أُخْرَى، يُؤَدِّي الضَّغْطُ الزَّائِدُ إِلَى ضَعْفِ التَّرْكِيزِ وَالذَّاكِرَةِ، مِمَّا يَجْعَلُ الطَّالِبَ يَخْسَرُ مَا تَعِبَ مِنْ أَجْلِهِ.</a:t>
@@ -10364,6 +10443,7 @@
                   <a:srgbClr val="1F2A37"/>
                 </a:solidFill>
                 <a:latin typeface="Amiri" pitchFamily="2" charset="-78"/>
+                <a:ea typeface="Amiri" pitchFamily="2" charset="-78"/>
                 <a:cs typeface="Amiri" pitchFamily="2" charset="-78"/>
               </a:rPr>
               <a:t>وَقَدْ رَأَيْتُ ذٰلِكَ فِي صَدِيقِي، الَّذِي كَانَ مِنْ أَذْكَى طُلَّابِ الصَّفِّ، لٰكِنَّهُ كَانَ يَخَافُ مِنَ الامْتِحَانَاتِ خَوْفًا شَدِيدًا. وَعِنْدَمَا شَارَكَ فِي بَرْنَامَجِ المَدْرَسَةِ لِلدَّعْمِ النَّفْسِيِّ، وَتَعَلَّمَ تَمَارِينَ التَّنَفُّسِ وَتَنْظِيمَ الوَقْتِ، تَحَسَّنَتْ نَتَائِجُهُ بِشَكْلٍ مُدْهِشٍ، وَعَادَتْ إِلَيْهِ ثِقَتُهُ بِنَفْسِهِ.</a:t>
@@ -10383,6 +10463,7 @@
                   <a:srgbClr val="1F2A37"/>
                 </a:solidFill>
                 <a:latin typeface="Amiri" pitchFamily="2" charset="-78"/>
+                <a:ea typeface="Amiri" pitchFamily="2" charset="-78"/>
                 <a:cs typeface="Amiri" pitchFamily="2" charset="-78"/>
               </a:rPr>
               <a:t>صَحِيحٌ أَنَّ الامْتِحَانَاتِ جُزْءٌ مِنْ حَيَاةِ كُلِّ طَالِبٍ، غَيْرَ أَنَّ المَدَارِسَ وَالأُسَرَ مَسْؤُولَةٌ عَنْ تَخْفِيفِ ضَغْطِهَا. وَإِذَا تَعَلَّمَ الطُّلَّابُ أَنَّ الدَّرَجَةَ لَا تُحَدِّدُ قِيمَتَهُمْ، فَسَيَدْخُلُونَ الامْتِحَانَ بِثِقَةٍ أَكْبَرَ وَخَوْفٍ أَقَلَّ، وَسَيُحَقِّقُونَ نَتَائِجَ أَفْضَلَ.</a:t>
@@ -10481,11 +10562,12 @@
               <a:buNone/>
             </a:pPr>
             <a:r>
-              <a:rPr lang="en-US" sz="950" b="1" dirty="0">
+              <a:rPr lang="ar-SA" sz="950" b="1" dirty="0">
                 <a:solidFill>
                   <a:srgbClr val="FFFFFF"/>
                 </a:solidFill>
                 <a:latin typeface="Calibri" pitchFamily="34" charset="0"/>
+                <a:ea typeface="Amiri" pitchFamily="2" charset="-78"/>
                 <a:cs typeface="Amiri" pitchFamily="2" charset="-78"/>
               </a:rPr>
               <a:t>حَتَّى إِنَّ بَعْضَهُمْ</a:t>
@@ -10546,11 +10628,12 @@
               <a:buNone/>
             </a:pPr>
             <a:r>
-              <a:rPr lang="en-US" sz="950" b="1" dirty="0">
+              <a:rPr lang="ar-SA" sz="950" b="1" dirty="0">
                 <a:solidFill>
                   <a:srgbClr val="FFFFFF"/>
                 </a:solidFill>
                 <a:latin typeface="Calibri" pitchFamily="34" charset="0"/>
+                <a:ea typeface="Amiri" pitchFamily="2" charset="-78"/>
                 <a:cs typeface="Amiri" pitchFamily="2" charset="-78"/>
               </a:rPr>
               <a:t>إِنَّ قَلِيلًا مِنَ القَلَقِ</a:t>
@@ -10611,11 +10694,12 @@
               <a:buNone/>
             </a:pPr>
             <a:r>
-              <a:rPr lang="en-US" sz="950" b="1" dirty="0">
+              <a:rPr lang="ar-SA" sz="950" b="1" dirty="0">
                 <a:solidFill>
                   <a:srgbClr val="FFFFFF"/>
                 </a:solidFill>
                 <a:latin typeface="Calibri" pitchFamily="34" charset="0"/>
+                <a:ea typeface="Amiri" pitchFamily="2" charset="-78"/>
                 <a:cs typeface="Amiri" pitchFamily="2" charset="-78"/>
               </a:rPr>
               <a:t>مِمَّا يَجْعَلُ</a:t>
@@ -10676,11 +10760,12 @@
               <a:buNone/>
             </a:pPr>
             <a:r>
-              <a:rPr lang="en-US" sz="950" b="1" dirty="0">
+              <a:rPr lang="ar-SA" sz="950" b="1" dirty="0">
                 <a:solidFill>
                   <a:srgbClr val="FFFFFF"/>
                 </a:solidFill>
                 <a:latin typeface="Calibri" pitchFamily="34" charset="0"/>
+                <a:ea typeface="Amiri" pitchFamily="2" charset="-78"/>
                 <a:cs typeface="Amiri" pitchFamily="2" charset="-78"/>
               </a:rPr>
               <a:t>إِذَا تَعَلَّمَ … فَسَيَدْخُلُونَ</a:t>
@@ -10814,6 +10899,7 @@
                   <a:srgbClr val="D4AF37"/>
                 </a:solidFill>
                 <a:latin typeface="Amiri" pitchFamily="2" charset="-78"/>
+                <a:ea typeface="Amiri" pitchFamily="2" charset="-78"/>
                 <a:cs typeface="Amiri" pitchFamily="2" charset="-78"/>
               </a:rPr>
               <a:t>م</a:t>
@@ -11134,6 +11220,7 @@
                   <a:srgbClr val="8A6D1E"/>
                 </a:solidFill>
                 <a:latin typeface="Amiri" pitchFamily="2" charset="-78"/>
+                <a:ea typeface="Amiri" pitchFamily="2" charset="-78"/>
                 <a:cs typeface="Amiri" pitchFamily="2" charset="-78"/>
               </a:rPr>
               <a:t>قَيِّمْ عَمَلَكَ</a:t>
@@ -12378,6 +12465,7 @@
                   <a:srgbClr val="FFFFFF"/>
                 </a:solidFill>
                 <a:latin typeface="Amiri" pitchFamily="2" charset="-78"/>
+                <a:ea typeface="Amiri" pitchFamily="2" charset="-78"/>
                 <a:cs typeface="Amiri" pitchFamily="2" charset="-78"/>
               </a:rPr>
               <a:t>أَحْسَنْتُمْ! إِلَى اللِّقَاءِ</a:t>
@@ -12530,6 +12618,7 @@
                   <a:srgbClr val="D4AF37"/>
                 </a:solidFill>
                 <a:latin typeface="Amiri" pitchFamily="2" charset="-78"/>
+                <a:ea typeface="Amiri" pitchFamily="2" charset="-78"/>
                 <a:cs typeface="Amiri" pitchFamily="2" charset="-78"/>
               </a:rPr>
               <a:t>وَرْشَةُ التَّدْرِيبِ</a:t>
@@ -12663,6 +12752,7 @@
                   <a:srgbClr val="D4AF37"/>
                 </a:solidFill>
                 <a:latin typeface="Amiri" pitchFamily="2" charset="-78"/>
+                <a:ea typeface="Amiri" pitchFamily="2" charset="-78"/>
                 <a:cs typeface="Amiri" pitchFamily="2" charset="-78"/>
               </a:rPr>
               <a:t>م</a:t>
@@ -12983,6 +13073,7 @@
                   <a:srgbClr val="8A6D1E"/>
                 </a:solidFill>
                 <a:latin typeface="Amiri" pitchFamily="2" charset="-78"/>
+                <a:ea typeface="Amiri" pitchFamily="2" charset="-78"/>
                 <a:cs typeface="Amiri" pitchFamily="2" charset="-78"/>
               </a:rPr>
               <a:t>آدَابُ الصَّفِّ</a:t>
@@ -14514,6 +14605,7 @@
                   <a:srgbClr val="D4AF37"/>
                 </a:solidFill>
                 <a:latin typeface="Amiri" pitchFamily="2" charset="-78"/>
+                <a:ea typeface="Amiri" pitchFamily="2" charset="-78"/>
                 <a:cs typeface="Amiri" pitchFamily="2" charset="-78"/>
               </a:rPr>
               <a:t>م</a:t>
@@ -14834,6 +14926,7 @@
                   <a:srgbClr val="8A6D1E"/>
                 </a:solidFill>
                 <a:latin typeface="Amiri" pitchFamily="2" charset="-78"/>
+                <a:ea typeface="Amiri" pitchFamily="2" charset="-78"/>
                 <a:cs typeface="Amiri" pitchFamily="2" charset="-78"/>
               </a:rPr>
               <a:t>خَرِيطَةُ الوَرْشَةِ</a:t>
@@ -15148,6 +15241,7 @@
                   <a:srgbClr val="1B3B6F"/>
                 </a:solidFill>
                 <a:latin typeface="Amiri" pitchFamily="2" charset="-78"/>
+                <a:ea typeface="Amiri" pitchFamily="2" charset="-78"/>
                 <a:cs typeface="Amiri" pitchFamily="2" charset="-78"/>
               </a:rPr>
               <a:t>كَيْفَ</a:t>
@@ -15424,6 +15518,7 @@
                   <a:srgbClr val="1E6B52"/>
                 </a:solidFill>
                 <a:latin typeface="Amiri" pitchFamily="2" charset="-78"/>
+                <a:ea typeface="Amiri" pitchFamily="2" charset="-78"/>
                 <a:cs typeface="Amiri" pitchFamily="2" charset="-78"/>
               </a:rPr>
               <a:t>الاسْتِمَارَةُ</a:t>
@@ -15700,6 +15795,7 @@
                   <a:srgbClr val="1E6B52"/>
                 </a:solidFill>
                 <a:latin typeface="Amiri" pitchFamily="2" charset="-78"/>
+                <a:ea typeface="Amiri" pitchFamily="2" charset="-78"/>
                 <a:cs typeface="Amiri" pitchFamily="2" charset="-78"/>
               </a:rPr>
               <a:t>الرِّسَالَةُ</a:t>
@@ -15976,6 +16072,7 @@
                   <a:srgbClr val="1E6B52"/>
                 </a:solidFill>
                 <a:latin typeface="Amiri" pitchFamily="2" charset="-78"/>
+                <a:ea typeface="Amiri" pitchFamily="2" charset="-78"/>
                 <a:cs typeface="Amiri" pitchFamily="2" charset="-78"/>
               </a:rPr>
               <a:t>المَقَالُ</a:t>
@@ -16252,6 +16349,7 @@
                   <a:srgbClr val="8A6D1E"/>
                 </a:solidFill>
                 <a:latin typeface="Amiri" pitchFamily="2" charset="-78"/>
+                <a:ea typeface="Amiri" pitchFamily="2" charset="-78"/>
                 <a:cs typeface="Amiri" pitchFamily="2" charset="-78"/>
               </a:rPr>
               <a:t>قَيِّمْ</a:t>
@@ -16495,6 +16593,7 @@
                   <a:srgbClr val="D4AF37"/>
                 </a:solidFill>
                 <a:latin typeface="Amiri" pitchFamily="2" charset="-78"/>
+                <a:ea typeface="Amiri" pitchFamily="2" charset="-78"/>
                 <a:cs typeface="Amiri" pitchFamily="2" charset="-78"/>
               </a:rPr>
               <a:t>م</a:t>
@@ -16815,6 +16914,7 @@
                   <a:srgbClr val="8A6D1E"/>
                 </a:solidFill>
                 <a:latin typeface="Amiri" pitchFamily="2" charset="-78"/>
+                <a:ea typeface="Amiri" pitchFamily="2" charset="-78"/>
                 <a:cs typeface="Amiri" pitchFamily="2" charset="-78"/>
               </a:rPr>
               <a:t>امْتِحَانُ الكِتَابَةِ</a:t>
@@ -17439,6 +17539,7 @@
                   <a:srgbClr val="1B3B6F"/>
                 </a:solidFill>
                 <a:latin typeface="Amiri" pitchFamily="2" charset="-78"/>
+                <a:ea typeface="Amiri" pitchFamily="2" charset="-78"/>
                 <a:cs typeface="Amiri" pitchFamily="2" charset="-78"/>
               </a:rPr>
               <a:t>إِنَّ تَنْظِيمَ الوَقْتِ أَهَمُّ مِنْ عَدَدِ السَّاعَاتِ</a:t>
@@ -17538,6 +17639,7 @@
                   <a:srgbClr val="1B3B6F"/>
                 </a:solidFill>
                 <a:latin typeface="Amiri" pitchFamily="2" charset="-78"/>
+                <a:ea typeface="Amiri" pitchFamily="2" charset="-78"/>
                 <a:cs typeface="Amiri" pitchFamily="2" charset="-78"/>
               </a:rPr>
               <a:t>كَانَتِ الأَسْئِلَةُ أَصْعَبَ مِمَّا تَوَقَّعْتُ</a:t>
@@ -17637,6 +17739,7 @@
                   <a:srgbClr val="1B3B6F"/>
                 </a:solidFill>
                 <a:latin typeface="Amiri" pitchFamily="2" charset="-78"/>
+                <a:ea typeface="Amiri" pitchFamily="2" charset="-78"/>
                 <a:cs typeface="Amiri" pitchFamily="2" charset="-78"/>
               </a:rPr>
               <a:t>يَنْبَغِي أَنْ تَبْدَأَ مُبَكِّرًا، وَلَا تَسْهَرْ</a:t>
@@ -17808,6 +17911,7 @@
                   <a:srgbClr val="D4AF37"/>
                 </a:solidFill>
                 <a:latin typeface="Amiri" pitchFamily="2" charset="-78"/>
+                <a:ea typeface="Amiri" pitchFamily="2" charset="-78"/>
                 <a:cs typeface="Amiri" pitchFamily="2" charset="-78"/>
               </a:rPr>
               <a:t>م</a:t>
@@ -18128,6 +18232,7 @@
                   <a:srgbClr val="8A6D1E"/>
                 </a:solidFill>
                 <a:latin typeface="Amiri" pitchFamily="2" charset="-78"/>
+                <a:ea typeface="Amiri" pitchFamily="2" charset="-78"/>
                 <a:cs typeface="Amiri" pitchFamily="2" charset="-78"/>
               </a:rPr>
               <a:t>اسْتِمَارَةُ خُطَّةِ المُرَاجَعَةِ</a:t>
@@ -18484,6 +18589,7 @@
                   <a:srgbClr val="1B3B6F"/>
                 </a:solidFill>
                 <a:latin typeface="Amiri" pitchFamily="2" charset="-78"/>
+                <a:ea typeface="Amiri" pitchFamily="2" charset="-78"/>
                 <a:cs typeface="Amiri" pitchFamily="2" charset="-78"/>
               </a:rPr>
               <a:t>الاسْمُ وَالصَّفُّ</a:t>
@@ -18728,6 +18834,7 @@
                   <a:srgbClr val="1B3B6F"/>
                 </a:solidFill>
                 <a:latin typeface="Amiri" pitchFamily="2" charset="-78"/>
+                <a:ea typeface="Amiri" pitchFamily="2" charset="-78"/>
                 <a:cs typeface="Amiri" pitchFamily="2" charset="-78"/>
               </a:rPr>
               <a:t>المَادَّةُ</a:t>
@@ -18972,6 +19079,7 @@
                   <a:srgbClr val="1B3B6F"/>
                 </a:solidFill>
                 <a:latin typeface="Amiri" pitchFamily="2" charset="-78"/>
+                <a:ea typeface="Amiri" pitchFamily="2" charset="-78"/>
                 <a:cs typeface="Amiri" pitchFamily="2" charset="-78"/>
               </a:rPr>
               <a:t>تَارِيخُ الامْتِحَانِ</a:t>
@@ -19216,6 +19324,7 @@
                   <a:srgbClr val="1B3B6F"/>
                 </a:solidFill>
                 <a:latin typeface="Amiri" pitchFamily="2" charset="-78"/>
+                <a:ea typeface="Amiri" pitchFamily="2" charset="-78"/>
                 <a:cs typeface="Amiri" pitchFamily="2" charset="-78"/>
               </a:rPr>
               <a:t>مَكَانُ المُرَاجَعَةِ</a:t>
@@ -19460,6 +19569,7 @@
                   <a:srgbClr val="1B3B6F"/>
                 </a:solidFill>
                 <a:latin typeface="Amiri" pitchFamily="2" charset="-78"/>
+                <a:ea typeface="Amiri" pitchFamily="2" charset="-78"/>
                 <a:cs typeface="Amiri" pitchFamily="2" charset="-78"/>
               </a:rPr>
               <a:t>عَدَدُ السَّاعَاتِ أُسْبُوعِيًّا</a:t>
@@ -19704,6 +19814,7 @@
                   <a:srgbClr val="1B3B6F"/>
                 </a:solidFill>
                 <a:latin typeface="Amiri" pitchFamily="2" charset="-78"/>
+                <a:ea typeface="Amiri" pitchFamily="2" charset="-78"/>
                 <a:cs typeface="Amiri" pitchFamily="2" charset="-78"/>
               </a:rPr>
               <a:t>طَرِيقَةُ المُرَاجَعَةِ</a:t>
@@ -19948,6 +20059,7 @@
                   <a:srgbClr val="1B3B6F"/>
                 </a:solidFill>
                 <a:latin typeface="Amiri" pitchFamily="2" charset="-78"/>
+                <a:ea typeface="Amiri" pitchFamily="2" charset="-78"/>
                 <a:cs typeface="Amiri" pitchFamily="2" charset="-78"/>
               </a:rPr>
               <a:t>أَكْبَرُ صُعُوبَةٍ</a:t>
@@ -20127,6 +20239,7 @@
                   <a:srgbClr val="1B3B6F"/>
                 </a:solidFill>
                 <a:latin typeface="Amiri" pitchFamily="2" charset="-78"/>
+                <a:ea typeface="Amiri" pitchFamily="2" charset="-78"/>
                 <a:cs typeface="Amiri" pitchFamily="2" charset="-78"/>
               </a:rPr>
               <a:t>جُمْلَةٌ: مَاذَا سَتُغَيِّرُ هٰذِهِ المَرَّةَ؟</a:t>
@@ -20336,6 +20449,7 @@
                   <a:srgbClr val="D4AF37"/>
                 </a:solidFill>
                 <a:latin typeface="Amiri" pitchFamily="2" charset="-78"/>
+                <a:ea typeface="Amiri" pitchFamily="2" charset="-78"/>
                 <a:cs typeface="Amiri" pitchFamily="2" charset="-78"/>
               </a:rPr>
               <a:t>م</a:t>
@@ -20656,6 +20770,7 @@
                   <a:srgbClr val="8A6D1E"/>
                 </a:solidFill>
                 <a:latin typeface="Amiri" pitchFamily="2" charset="-78"/>
+                <a:ea typeface="Amiri" pitchFamily="2" charset="-78"/>
                 <a:cs typeface="Amiri" pitchFamily="2" charset="-78"/>
               </a:rPr>
               <a:t>نَمُوذَجُ الإِجَابَةِ</a:t>
@@ -20974,6 +21089,7 @@
                   <a:srgbClr val="1B3B6F"/>
                 </a:solidFill>
                 <a:latin typeface="Amiri" pitchFamily="2" charset="-78"/>
+                <a:ea typeface="Amiri" pitchFamily="2" charset="-78"/>
                 <a:cs typeface="Amiri" pitchFamily="2" charset="-78"/>
               </a:rPr>
               <a:t>يَاسِرُ عَلِيٌّ، الحَادِي عَشَرَ</a:t>
@@ -21012,6 +21128,7 @@
                   <a:srgbClr val="1B3B6F"/>
                 </a:solidFill>
                 <a:latin typeface="Amiri" pitchFamily="2" charset="-78"/>
+                <a:ea typeface="Amiri" pitchFamily="2" charset="-78"/>
                 <a:cs typeface="Amiri" pitchFamily="2" charset="-78"/>
               </a:rPr>
               <a:t>الاسْمُ وَالصَّفُّ</a:t>
@@ -21153,6 +21270,7 @@
                   <a:srgbClr val="1B3B6F"/>
                 </a:solidFill>
                 <a:latin typeface="Amiri" pitchFamily="2" charset="-78"/>
+                <a:ea typeface="Amiri" pitchFamily="2" charset="-78"/>
                 <a:cs typeface="Amiri" pitchFamily="2" charset="-78"/>
               </a:rPr>
               <a:t>الكِيمْيَاءُ</a:t>
@@ -21191,6 +21309,7 @@
                   <a:srgbClr val="1B3B6F"/>
                 </a:solidFill>
                 <a:latin typeface="Amiri" pitchFamily="2" charset="-78"/>
+                <a:ea typeface="Amiri" pitchFamily="2" charset="-78"/>
                 <a:cs typeface="Amiri" pitchFamily="2" charset="-78"/>
               </a:rPr>
               <a:t>المَادَّةُ</a:t>
@@ -21332,6 +21451,7 @@
                   <a:srgbClr val="1B3B6F"/>
                 </a:solidFill>
                 <a:latin typeface="Amiri" pitchFamily="2" charset="-78"/>
+                <a:ea typeface="Amiri" pitchFamily="2" charset="-78"/>
                 <a:cs typeface="Amiri" pitchFamily="2" charset="-78"/>
               </a:rPr>
               <a:t>١٢ مَايُو</a:t>
@@ -21370,6 +21490,7 @@
                   <a:srgbClr val="1B3B6F"/>
                 </a:solidFill>
                 <a:latin typeface="Amiri" pitchFamily="2" charset="-78"/>
+                <a:ea typeface="Amiri" pitchFamily="2" charset="-78"/>
                 <a:cs typeface="Amiri" pitchFamily="2" charset="-78"/>
               </a:rPr>
               <a:t>تَارِيخُ الامْتِحَانِ</a:t>
@@ -21511,6 +21632,7 @@
                   <a:srgbClr val="1B3B6F"/>
                 </a:solidFill>
                 <a:latin typeface="Amiri" pitchFamily="2" charset="-78"/>
+                <a:ea typeface="Amiri" pitchFamily="2" charset="-78"/>
                 <a:cs typeface="Amiri" pitchFamily="2" charset="-78"/>
               </a:rPr>
               <a:t>المَكْتَبَةُ</a:t>
@@ -21549,6 +21671,7 @@
                   <a:srgbClr val="1B3B6F"/>
                 </a:solidFill>
                 <a:latin typeface="Amiri" pitchFamily="2" charset="-78"/>
+                <a:ea typeface="Amiri" pitchFamily="2" charset="-78"/>
                 <a:cs typeface="Amiri" pitchFamily="2" charset="-78"/>
               </a:rPr>
               <a:t>مَكَانُ المُرَاجَعَةِ</a:t>
@@ -21690,6 +21813,7 @@
                   <a:srgbClr val="1B3B6F"/>
                 </a:solidFill>
                 <a:latin typeface="Amiri" pitchFamily="2" charset="-78"/>
+                <a:ea typeface="Amiri" pitchFamily="2" charset="-78"/>
                 <a:cs typeface="Amiri" pitchFamily="2" charset="-78"/>
               </a:rPr>
               <a:t>عَشْرُ سَاعَاتٍ</a:t>
@@ -21728,6 +21852,7 @@
                   <a:srgbClr val="1B3B6F"/>
                 </a:solidFill>
                 <a:latin typeface="Amiri" pitchFamily="2" charset="-78"/>
+                <a:ea typeface="Amiri" pitchFamily="2" charset="-78"/>
                 <a:cs typeface="Amiri" pitchFamily="2" charset="-78"/>
               </a:rPr>
               <a:t>عَدَدُ السَّاعَاتِ أُسْبُوعِيًّا</a:t>
@@ -21869,6 +21994,7 @@
                   <a:srgbClr val="1B3B6F"/>
                 </a:solidFill>
                 <a:latin typeface="Amiri" pitchFamily="2" charset="-78"/>
+                <a:ea typeface="Amiri" pitchFamily="2" charset="-78"/>
                 <a:cs typeface="Amiri" pitchFamily="2" charset="-78"/>
               </a:rPr>
               <a:t>المُلَخَّصَاتُ وَالامْتِحَانَاتُ السَّابِقَةُ</a:t>
@@ -21907,6 +22033,7 @@
                   <a:srgbClr val="1B3B6F"/>
                 </a:solidFill>
                 <a:latin typeface="Amiri" pitchFamily="2" charset="-78"/>
+                <a:ea typeface="Amiri" pitchFamily="2" charset="-78"/>
                 <a:cs typeface="Amiri" pitchFamily="2" charset="-78"/>
               </a:rPr>
               <a:t>طَرِيقَةُ المُرَاجَعَةِ</a:t>
@@ -22048,6 +22175,7 @@
                   <a:srgbClr val="1B3B6F"/>
                 </a:solidFill>
                 <a:latin typeface="Amiri" pitchFamily="2" charset="-78"/>
+                <a:ea typeface="Amiri" pitchFamily="2" charset="-78"/>
                 <a:cs typeface="Amiri" pitchFamily="2" charset="-78"/>
               </a:rPr>
               <a:t>التَّرْكِيزُ لِمُدَّةٍ طَوِيلَةٍ</a:t>
@@ -22086,6 +22214,7 @@
                   <a:srgbClr val="1B3B6F"/>
                 </a:solidFill>
                 <a:latin typeface="Amiri" pitchFamily="2" charset="-78"/>
+                <a:ea typeface="Amiri" pitchFamily="2" charset="-78"/>
                 <a:cs typeface="Amiri" pitchFamily="2" charset="-78"/>
               </a:rPr>
               <a:t>أَكْبَرُ صُعُوبَةٍ</a:t>
@@ -22227,6 +22356,7 @@
                   <a:srgbClr val="1B3B6F"/>
                 </a:solidFill>
                 <a:latin typeface="Amiri" pitchFamily="2" charset="-78"/>
+                <a:ea typeface="Amiri" pitchFamily="2" charset="-78"/>
                 <a:cs typeface="Amiri" pitchFamily="2" charset="-78"/>
               </a:rPr>
               <a:t>سَأَبْدَأُ المُرَاجَعَةَ قَبْلَ شَهْرٍ، وَلَنْ أَسْهَرَ قَبْلَ الامْتِحَانِ.</a:t>
@@ -22265,6 +22395,7 @@
                   <a:srgbClr val="1B3B6F"/>
                 </a:solidFill>
                 <a:latin typeface="Amiri" pitchFamily="2" charset="-78"/>
+                <a:ea typeface="Amiri" pitchFamily="2" charset="-78"/>
                 <a:cs typeface="Amiri" pitchFamily="2" charset="-78"/>
               </a:rPr>
               <a:t>جُمْلَةٌ: مَاذَا سَتُغَيِّرُ هٰذِهِ المَرَّةَ؟</a:t>
@@ -22474,6 +22605,7 @@
                   <a:srgbClr val="D4AF37"/>
                 </a:solidFill>
                 <a:latin typeface="Amiri" pitchFamily="2" charset="-78"/>
+                <a:ea typeface="Amiri" pitchFamily="2" charset="-78"/>
                 <a:cs typeface="Amiri" pitchFamily="2" charset="-78"/>
               </a:rPr>
               <a:t>م</a:t>
@@ -22794,6 +22926,7 @@
                   <a:srgbClr val="8A6D1E"/>
                 </a:solidFill>
                 <a:latin typeface="Amiri" pitchFamily="2" charset="-78"/>
+                <a:ea typeface="Amiri" pitchFamily="2" charset="-78"/>
                 <a:cs typeface="Amiri" pitchFamily="2" charset="-78"/>
               </a:rPr>
               <a:t>نَصَائِحُ قَبْلَ الامْتِحَانَاتِ</a:t>
@@ -23269,6 +23402,7 @@
                   <a:srgbClr val="1B3B6F"/>
                 </a:solidFill>
                 <a:latin typeface="Amiri" pitchFamily="2" charset="-78"/>
+                <a:ea typeface="Amiri" pitchFamily="2" charset="-78"/>
                 <a:cs typeface="Amiri" pitchFamily="2" charset="-78"/>
               </a:rPr>
               <a:t>أُرَاجِعُ فِي … مِنَ السَّاعَةِ … إِلَى …</a:t>
@@ -23345,6 +23479,7 @@
                   <a:srgbClr val="1B3B6F"/>
                 </a:solidFill>
                 <a:latin typeface="Amiri" pitchFamily="2" charset="-78"/>
+                <a:ea typeface="Amiri" pitchFamily="2" charset="-78"/>
                 <a:cs typeface="Amiri" pitchFamily="2" charset="-78"/>
               </a:rPr>
               <a:t>كَانَ الاخْتِبَارُ صَعْبًا، لِأَنِّي …</a:t>
@@ -23421,6 +23556,7 @@
                   <a:srgbClr val="1B3B6F"/>
                 </a:solidFill>
                 <a:latin typeface="Amiri" pitchFamily="2" charset="-78"/>
+                <a:ea typeface="Amiri" pitchFamily="2" charset="-78"/>
                 <a:cs typeface="Amiri" pitchFamily="2" charset="-78"/>
               </a:rPr>
               <a:t>إِنَّ تَنْظِيمَ الوَقْتِ مُهِمٌّ</a:t>
@@ -23497,6 +23633,7 @@
                   <a:srgbClr val="1B3B6F"/>
                 </a:solidFill>
                 <a:latin typeface="Amiri" pitchFamily="2" charset="-78"/>
+                <a:ea typeface="Amiri" pitchFamily="2" charset="-78"/>
                 <a:cs typeface="Amiri" pitchFamily="2" charset="-78"/>
               </a:rPr>
               <a:t>يَنْبَغِي أَنْ تَبْدَأَ … وَلَا تَسْهَرْ</a:t>
@@ -23668,6 +23805,7 @@
                   <a:srgbClr val="D4AF37"/>
                 </a:solidFill>
                 <a:latin typeface="Amiri" pitchFamily="2" charset="-78"/>
+                <a:ea typeface="Amiri" pitchFamily="2" charset="-78"/>
                 <a:cs typeface="Amiri" pitchFamily="2" charset="-78"/>
               </a:rPr>
               <a:t>م</a:t>
@@ -23988,6 +24126,7 @@
                   <a:srgbClr val="8A6D1E"/>
                 </a:solidFill>
                 <a:latin typeface="Amiri" pitchFamily="2" charset="-78"/>
+                <a:ea typeface="Amiri" pitchFamily="2" charset="-78"/>
                 <a:cs typeface="Amiri" pitchFamily="2" charset="-78"/>
               </a:rPr>
               <a:t>نَصُّ السُّؤَالِ</a:t>
@@ -24268,6 +24407,7 @@
                   <a:srgbClr val="1B3B6F"/>
                 </a:solidFill>
                 <a:latin typeface="Amiri" pitchFamily="2" charset="-78"/>
+                <a:ea typeface="Amiri" pitchFamily="2" charset="-78"/>
                 <a:cs typeface="Amiri" pitchFamily="2" charset="-78"/>
               </a:rPr>
               <a:t>صَدِيقُكَ قَلِقٌ مِنَ الامْتِحَانَاتِ. اكْتُبْ لَهُ رِسَالَةً (٨٠–٩٠ كَلِمَةً).</a:t>
@@ -24409,6 +24549,7 @@
                   <a:srgbClr val="1B3B6F"/>
                 </a:solidFill>
                 <a:latin typeface="Amiri" pitchFamily="2" charset="-78"/>
+                <a:ea typeface="Amiri" pitchFamily="2" charset="-78"/>
                 <a:cs typeface="Amiri" pitchFamily="2" charset="-78"/>
               </a:rPr>
               <a:t>كَيْفَ وَمَتَى تُرَاجِعُ؟</a:t>
@@ -24550,6 +24691,7 @@
                   <a:srgbClr val="1B3B6F"/>
                 </a:solidFill>
                 <a:latin typeface="Amiri" pitchFamily="2" charset="-78"/>
+                <a:ea typeface="Amiri" pitchFamily="2" charset="-78"/>
                 <a:cs typeface="Amiri" pitchFamily="2" charset="-78"/>
               </a:rPr>
               <a:t>مَاذَا حَدَثَ فِي اخْتِبَارٍ مُؤَخَّرًا؟</a:t>
@@ -24691,6 +24833,7 @@
                   <a:srgbClr val="1B3B6F"/>
                 </a:solidFill>
                 <a:latin typeface="Amiri" pitchFamily="2" charset="-78"/>
+                <a:ea typeface="Amiri" pitchFamily="2" charset="-78"/>
                 <a:cs typeface="Amiri" pitchFamily="2" charset="-78"/>
               </a:rPr>
               <a:t>مَا أَفْضَلُ طَرِيقَةٍ لِلِاسْتِعْدَادِ فِي رَأْيِكَ؟</a:t>
@@ -24832,6 +24975,7 @@
                   <a:srgbClr val="1B3B6F"/>
                 </a:solidFill>
                 <a:latin typeface="Amiri" pitchFamily="2" charset="-78"/>
+                <a:ea typeface="Amiri" pitchFamily="2" charset="-78"/>
                 <a:cs typeface="Amiri" pitchFamily="2" charset="-78"/>
               </a:rPr>
               <a:t>مَا نَصِيحَتُكَ؟ وَمَاذَا سَتَفْعَلُ بَعْدَ الامْتِحَانَاتِ؟</a:t>
@@ -25041,6 +25185,7 @@
                   <a:srgbClr val="D4AF37"/>
                 </a:solidFill>
                 <a:latin typeface="Amiri" pitchFamily="2" charset="-78"/>
+                <a:ea typeface="Amiri" pitchFamily="2" charset="-78"/>
                 <a:cs typeface="Amiri" pitchFamily="2" charset="-78"/>
               </a:rPr>
               <a:t>م</a:t>
@@ -25361,6 +25506,7 @@
                   <a:srgbClr val="8A6D1E"/>
                 </a:solidFill>
                 <a:latin typeface="Amiri" pitchFamily="2" charset="-78"/>
+                <a:ea typeface="Amiri" pitchFamily="2" charset="-78"/>
                 <a:cs typeface="Amiri" pitchFamily="2" charset="-78"/>
               </a:rPr>
               <a:t>قَوَالِبُ الكِتَابَةِ</a:t>
@@ -25641,6 +25787,7 @@
                   <a:srgbClr val="1B3B6F"/>
                 </a:solidFill>
                 <a:latin typeface="Amiri" pitchFamily="2" charset="-78"/>
+                <a:ea typeface="Amiri" pitchFamily="2" charset="-78"/>
                 <a:cs typeface="Amiri" pitchFamily="2" charset="-78"/>
               </a:rPr>
               <a:t>مَرْحَبًا يَا ______ ، كَيْفَ حَالُكَ؟</a:t>
@@ -25847,6 +25994,7 @@
                   <a:srgbClr val="1B3B6F"/>
                 </a:solidFill>
                 <a:latin typeface="Amiri" pitchFamily="2" charset="-78"/>
+                <a:ea typeface="Amiri" pitchFamily="2" charset="-78"/>
                 <a:cs typeface="Amiri" pitchFamily="2" charset="-78"/>
               </a:rPr>
               <a:t>أُرَاجِعُ فِي ______ مِنَ السَّاعَةِ ______ إِلَى ______ ، وَأَكْتُبُ ______ .</a:t>
@@ -26053,6 +26201,7 @@
                   <a:srgbClr val="1B3B6F"/>
                 </a:solidFill>
                 <a:latin typeface="Amiri" pitchFamily="2" charset="-78"/>
+                <a:ea typeface="Amiri" pitchFamily="2" charset="-78"/>
                 <a:cs typeface="Amiri" pitchFamily="2" charset="-78"/>
               </a:rPr>
               <a:t>فِي الأُسْبُوعِ المَاضِي كَانَ عِنْدِي اخْتِبَارٌ فِي ______ ، وَكَانَ ______ .</a:t>
@@ -26259,6 +26408,7 @@
                   <a:srgbClr val="1B3B6F"/>
                 </a:solidFill>
                 <a:latin typeface="Amiri" pitchFamily="2" charset="-78"/>
+                <a:ea typeface="Amiri" pitchFamily="2" charset="-78"/>
                 <a:cs typeface="Amiri" pitchFamily="2" charset="-78"/>
               </a:rPr>
               <a:t>فِي رَأْيِي، إِنَّ ______ مُهِمٌّ جِدًّا.</a:t>
@@ -26465,6 +26615,7 @@
                   <a:srgbClr val="1B3B6F"/>
                 </a:solidFill>
                 <a:latin typeface="Amiri" pitchFamily="2" charset="-78"/>
+                <a:ea typeface="Amiri" pitchFamily="2" charset="-78"/>
                 <a:cs typeface="Amiri" pitchFamily="2" charset="-78"/>
               </a:rPr>
               <a:t>يَنْبَغِي أَنْ ______ ، وَلَا ______ . بَعْدَ الامْتِحَانَاتِ سَأُسَافِرُ إِلَى ______ .</a:t>
@@ -26671,6 +26822,7 @@
                   <a:srgbClr val="1B3B6F"/>
                 </a:solidFill>
                 <a:latin typeface="Amiri" pitchFamily="2" charset="-78"/>
+                <a:ea typeface="Amiri" pitchFamily="2" charset="-78"/>
                 <a:cs typeface="Amiri" pitchFamily="2" charset="-78"/>
               </a:rPr>
               <a:t>إِلَى اللِّقَاءِ، ______</a:t>
@@ -26910,13 +27062,9 @@
     <a:fontScheme name="Office">
       <a:majorFont>
         <a:latin typeface="Calibri Light" panose="020F0302020204030204"/>
-        <a:ea typeface=""/>
-        <a:cs typeface=""/>
-        <a:font script="Jpan" typeface="游ゴシック Light"/>
-        <a:font script="Hang" typeface="맑은 고딕"/>
-        <a:font script="Hans" typeface="等线 Light"/>
-        <a:font script="Hant" typeface="新細明體"/>
-        <a:font script="Arab" typeface="Times New Roman"/>
+        <a:ea typeface="Amiri" pitchFamily="2" charset="-78"/>
+        <a:cs typeface="Amiri" pitchFamily="2" charset="-78"/>
+        <a:font script="Arab" typeface="Amiri"/>
         <a:font script="Hebr" typeface="Times New Roman"/>
         <a:font script="Thai" typeface="Angsana New"/>
         <a:font script="Ethi" typeface="Nyala"/>
@@ -26962,13 +27110,9 @@
       </a:majorFont>
       <a:minorFont>
         <a:latin typeface="Calibri" panose="020F0502020204030204"/>
-        <a:ea typeface=""/>
-        <a:cs typeface=""/>
-        <a:font script="Jpan" typeface="游ゴシック"/>
-        <a:font script="Hang" typeface="맑은 고딕"/>
-        <a:font script="Hans" typeface="等线"/>
-        <a:font script="Hant" typeface="新細明體"/>
-        <a:font script="Arab" typeface="Arial"/>
+        <a:ea typeface="Amiri" pitchFamily="2" charset="-78"/>
+        <a:cs typeface="Amiri" pitchFamily="2" charset="-78"/>
+        <a:font script="Arab" typeface="Amiri"/>
         <a:font script="Hebr" typeface="Arial"/>
         <a:font script="Thai" typeface="Cordia New"/>
         <a:font script="Ethi" typeface="Nyala"/>

--- a/Topic_D/Exam_Practice/TD-L04_Writing_Workshop_Studying_Exams_and_Learning_Strategies.pptx
+++ b/Topic_D/Exam_Practice/TD-L04_Writing_Workshop_Studying_Exams_and_Learning_Strategies.pptx
@@ -3848,7 +3848,7 @@
                 <a:solidFill>
                   <a:srgbClr val="FFFFFF"/>
                 </a:solidFill>
-                <a:latin typeface="Calibri" pitchFamily="34" charset="0"/>
+                <a:latin typeface="Amiri" pitchFamily="2" charset="-78"/>
                 <a:ea typeface="Amiri" pitchFamily="2" charset="-78"/>
                 <a:cs typeface="Amiri" pitchFamily="2" charset="-78"/>
               </a:rPr>
@@ -3914,7 +3914,7 @@
                 <a:solidFill>
                   <a:srgbClr val="FFFFFF"/>
                 </a:solidFill>
-                <a:latin typeface="Calibri" pitchFamily="34" charset="0"/>
+                <a:latin typeface="Amiri" pitchFamily="2" charset="-78"/>
                 <a:ea typeface="Amiri" pitchFamily="2" charset="-78"/>
                 <a:cs typeface="Amiri" pitchFamily="2" charset="-78"/>
               </a:rPr>
@@ -3980,7 +3980,7 @@
                 <a:solidFill>
                   <a:srgbClr val="FFFFFF"/>
                 </a:solidFill>
-                <a:latin typeface="Calibri" pitchFamily="34" charset="0"/>
+                <a:latin typeface="Amiri" pitchFamily="2" charset="-78"/>
                 <a:ea typeface="Amiri" pitchFamily="2" charset="-78"/>
                 <a:cs typeface="Amiri" pitchFamily="2" charset="-78"/>
               </a:rPr>
@@ -4046,7 +4046,7 @@
                 <a:solidFill>
                   <a:srgbClr val="FFFFFF"/>
                 </a:solidFill>
-                <a:latin typeface="Calibri" pitchFamily="34" charset="0"/>
+                <a:latin typeface="Amiri" pitchFamily="2" charset="-78"/>
                 <a:ea typeface="Amiri" pitchFamily="2" charset="-78"/>
                 <a:cs typeface="Amiri" pitchFamily="2" charset="-78"/>
               </a:rPr>
@@ -4844,7 +4844,7 @@
                 <a:solidFill>
                   <a:srgbClr val="FFFFFF"/>
                 </a:solidFill>
-                <a:latin typeface="Calibri" pitchFamily="34" charset="0"/>
+                <a:latin typeface="Amiri" pitchFamily="2" charset="-78"/>
                 <a:ea typeface="Amiri" pitchFamily="2" charset="-78"/>
                 <a:cs typeface="Amiri" pitchFamily="2" charset="-78"/>
               </a:rPr>
@@ -4910,7 +4910,7 @@
                 <a:solidFill>
                   <a:srgbClr val="FFFFFF"/>
                 </a:solidFill>
-                <a:latin typeface="Calibri" pitchFamily="34" charset="0"/>
+                <a:latin typeface="Amiri" pitchFamily="2" charset="-78"/>
                 <a:ea typeface="Amiri" pitchFamily="2" charset="-78"/>
                 <a:cs typeface="Amiri" pitchFamily="2" charset="-78"/>
               </a:rPr>
@@ -4976,7 +4976,7 @@
                 <a:solidFill>
                   <a:srgbClr val="FFFFFF"/>
                 </a:solidFill>
-                <a:latin typeface="Calibri" pitchFamily="34" charset="0"/>
+                <a:latin typeface="Amiri" pitchFamily="2" charset="-78"/>
                 <a:ea typeface="Amiri" pitchFamily="2" charset="-78"/>
                 <a:cs typeface="Amiri" pitchFamily="2" charset="-78"/>
               </a:rPr>
@@ -5042,7 +5042,7 @@
                 <a:solidFill>
                   <a:srgbClr val="FFFFFF"/>
                 </a:solidFill>
-                <a:latin typeface="Calibri" pitchFamily="34" charset="0"/>
+                <a:latin typeface="Amiri" pitchFamily="2" charset="-78"/>
                 <a:ea typeface="Amiri" pitchFamily="2" charset="-78"/>
                 <a:cs typeface="Amiri" pitchFamily="2" charset="-78"/>
               </a:rPr>
@@ -8596,7 +8596,7 @@
                 <a:solidFill>
                   <a:srgbClr val="FFFFFF"/>
                 </a:solidFill>
-                <a:latin typeface="Calibri" pitchFamily="34" charset="0"/>
+                <a:latin typeface="Amiri" pitchFamily="2" charset="-78"/>
                 <a:ea typeface="Amiri" pitchFamily="2" charset="-78"/>
                 <a:cs typeface="Amiri" pitchFamily="2" charset="-78"/>
               </a:rPr>
@@ -8662,7 +8662,7 @@
                 <a:solidFill>
                   <a:srgbClr val="FFFFFF"/>
                 </a:solidFill>
-                <a:latin typeface="Calibri" pitchFamily="34" charset="0"/>
+                <a:latin typeface="Amiri" pitchFamily="2" charset="-78"/>
                 <a:ea typeface="Amiri" pitchFamily="2" charset="-78"/>
                 <a:cs typeface="Amiri" pitchFamily="2" charset="-78"/>
               </a:rPr>
@@ -8728,7 +8728,7 @@
                 <a:solidFill>
                   <a:srgbClr val="FFFFFF"/>
                 </a:solidFill>
-                <a:latin typeface="Calibri" pitchFamily="34" charset="0"/>
+                <a:latin typeface="Amiri" pitchFamily="2" charset="-78"/>
                 <a:ea typeface="Amiri" pitchFamily="2" charset="-78"/>
                 <a:cs typeface="Amiri" pitchFamily="2" charset="-78"/>
               </a:rPr>
@@ -8794,7 +8794,7 @@
                 <a:solidFill>
                   <a:srgbClr val="FFFFFF"/>
                 </a:solidFill>
-                <a:latin typeface="Calibri" pitchFamily="34" charset="0"/>
+                <a:latin typeface="Amiri" pitchFamily="2" charset="-78"/>
                 <a:ea typeface="Amiri" pitchFamily="2" charset="-78"/>
                 <a:cs typeface="Amiri" pitchFamily="2" charset="-78"/>
               </a:rPr>
@@ -9581,7 +9581,7 @@
                 <a:solidFill>
                   <a:srgbClr val="FFFFFF"/>
                 </a:solidFill>
-                <a:latin typeface="Calibri" pitchFamily="34" charset="0"/>
+                <a:latin typeface="Amiri" pitchFamily="2" charset="-78"/>
                 <a:ea typeface="Amiri" pitchFamily="2" charset="-78"/>
                 <a:cs typeface="Amiri" pitchFamily="2" charset="-78"/>
               </a:rPr>
@@ -9647,7 +9647,7 @@
                 <a:solidFill>
                   <a:srgbClr val="FFFFFF"/>
                 </a:solidFill>
-                <a:latin typeface="Calibri" pitchFamily="34" charset="0"/>
+                <a:latin typeface="Amiri" pitchFamily="2" charset="-78"/>
                 <a:ea typeface="Amiri" pitchFamily="2" charset="-78"/>
                 <a:cs typeface="Amiri" pitchFamily="2" charset="-78"/>
               </a:rPr>
@@ -9713,7 +9713,7 @@
                 <a:solidFill>
                   <a:srgbClr val="FFFFFF"/>
                 </a:solidFill>
-                <a:latin typeface="Calibri" pitchFamily="34" charset="0"/>
+                <a:latin typeface="Amiri" pitchFamily="2" charset="-78"/>
                 <a:ea typeface="Amiri" pitchFamily="2" charset="-78"/>
                 <a:cs typeface="Amiri" pitchFamily="2" charset="-78"/>
               </a:rPr>
@@ -9779,7 +9779,7 @@
                 <a:solidFill>
                   <a:srgbClr val="FFFFFF"/>
                 </a:solidFill>
-                <a:latin typeface="Calibri" pitchFamily="34" charset="0"/>
+                <a:latin typeface="Amiri" pitchFamily="2" charset="-78"/>
                 <a:ea typeface="Amiri" pitchFamily="2" charset="-78"/>
                 <a:cs typeface="Amiri" pitchFamily="2" charset="-78"/>
               </a:rPr>
@@ -10566,7 +10566,7 @@
                 <a:solidFill>
                   <a:srgbClr val="FFFFFF"/>
                 </a:solidFill>
-                <a:latin typeface="Calibri" pitchFamily="34" charset="0"/>
+                <a:latin typeface="Amiri" pitchFamily="2" charset="-78"/>
                 <a:ea typeface="Amiri" pitchFamily="2" charset="-78"/>
                 <a:cs typeface="Amiri" pitchFamily="2" charset="-78"/>
               </a:rPr>
@@ -10632,7 +10632,7 @@
                 <a:solidFill>
                   <a:srgbClr val="FFFFFF"/>
                 </a:solidFill>
-                <a:latin typeface="Calibri" pitchFamily="34" charset="0"/>
+                <a:latin typeface="Amiri" pitchFamily="2" charset="-78"/>
                 <a:ea typeface="Amiri" pitchFamily="2" charset="-78"/>
                 <a:cs typeface="Amiri" pitchFamily="2" charset="-78"/>
               </a:rPr>
@@ -10698,7 +10698,7 @@
                 <a:solidFill>
                   <a:srgbClr val="FFFFFF"/>
                 </a:solidFill>
-                <a:latin typeface="Calibri" pitchFamily="34" charset="0"/>
+                <a:latin typeface="Amiri" pitchFamily="2" charset="-78"/>
                 <a:ea typeface="Amiri" pitchFamily="2" charset="-78"/>
                 <a:cs typeface="Amiri" pitchFamily="2" charset="-78"/>
               </a:rPr>
@@ -10764,7 +10764,7 @@
                 <a:solidFill>
                   <a:srgbClr val="FFFFFF"/>
                 </a:solidFill>
-                <a:latin typeface="Calibri" pitchFamily="34" charset="0"/>
+                <a:latin typeface="Amiri" pitchFamily="2" charset="-78"/>
                 <a:ea typeface="Amiri" pitchFamily="2" charset="-78"/>
                 <a:cs typeface="Amiri" pitchFamily="2" charset="-78"/>
               </a:rPr>
